--- a/curso_es/pptx/S25.pptx
+++ b/curso_es/pptx/S25.pptx
@@ -4108,7 +4108,7 @@
                 </a:solidFill>
                 <a:latin typeface="Nunito Sans"/>
               </a:rPr>
-              <a:t>Naiara lleva la bici al taller. La mecánica le dice que la cadena está gastada y que hay que cambiarla.</a:t>
+              <a:t>Una chica lleva la bici al taller. La mecánica le dice que la cadena está gastada y que hay que cambiarla.</a:t>
             </a:r>
           </a:p>
         </p:txBody>
@@ -4181,7 +4181,7 @@
                 </a:solidFill>
                 <a:latin typeface="Nunito Sans"/>
               </a:rPr>
-              <a:t>¿Puede obligar a Naiara? No: no manda sobre ella.</a:t>
+              <a:t>¿Puede obligar a esa chica? No: no manda sobre ella.</a:t>
             </a:r>
           </a:p>
           <a:p>
@@ -4726,7 +4726,7 @@
                 </a:solidFill>
                 <a:latin typeface="Nunito Sans"/>
               </a:rPr>
-              <a:t>En la playa, el socorrista pita: «¡Fuera del agua, hay corrientes!». Iker: «Solo tiene poder. Tener poder no es tener razón».</a:t>
+              <a:t>En la playa, el socorrista pita: «¡Fuera del agua, hay corrientes!». Un chico: «Solo tiene poder. Tener poder no es tener razón».</a:t>
             </a:r>
           </a:p>
         </p:txBody>
